--- a/artifacts/step_by_step/comments/bench01/demo/bench01_comments_slides.pptx
+++ b/artifacts/step_by_step/comments/bench01/demo/bench01_comments_slides.pptx
@@ -653,6 +653,12 @@
               <a:t>(15초) 데이터는 사람이 라벨을 붙인 연예 뉴스 댓글 8,367건입니다. 같은 기사의 댓글이 학습과 평가에 섞이면 점수가 부풀려져서, 기사 단위로 다시 나눴습니다. 같은 기준 모델로 비교하면 0.569가 0.553으로 내려갑니다.</a:t>
             </a:r>
           </a:p>
+          <a:p/>
+          <a:p>
+            <a:r>
+              <a:t>(예상 질문) 0.553은 분할 방식만 비교하려고 train과 validation을 5번 다시 나눠 잰 평균입니다. 실제로 모델을 고른 분할의 기준 모델 validation 점수(다음 장의 0.529)와는 다른 값입니다.</a:t>
+            </a:r>
+          </a:p>
         </p:txBody>
       </p:sp>
       <p:sp>
@@ -723,6 +729,12 @@
               <a:t>(25초) 분류 모델은 기준 모델인 TF-IDF와 로지스틱 회귀를 포함해 10개를 같은 분할에서 비교했습니다. 댓글로 사전학습한 KcELECTRA가 가장 좋았고, 크기가 훨씬 큰 RoBERTa-large보다도 나았습니다. 고른 뒤 test로 한 번만 평가해 Macro F1 0.667, 기준 모델은 0.540이었습니다. (그래프 값은 모델마다 가장 좋은 설정의 validation 점수이고, 시드가 여럿이면 평균입니다.)</a:t>
             </a:r>
           </a:p>
+          <a:p/>
+          <a:p>
+            <a:r>
+              <a:t>(예상 질문) 기준 모델 점수가 0.529, 0.553, 0.540으로 다른 이유 → 셋 다 TF-IDF + 로지스틱 회귀지만 잰 데이터가 다릅니다. 0.529는 이 그래프의 validation 840건, 0.553은 데이터 장에서 분할 방식만 비교하려고 train과 validation을 5번 다시 나눠 잰 평균(기사 단위), 0.540은 test 838건에서 한 번 잰 점수입니다. 그래프의 LinearSVC 0.540은 기준 모델의 test 점수와 우연히 같은 값입니다.</a:t>
+            </a:r>
+          </a:p>
         </p:txBody>
       </p:sp>
       <p:sp>
@@ -790,7 +802,13 @@
           <a:lstStyle/>
           <a:p>
             <a:r>
-              <a:t>(20초) 생성 모델도 기본값을 그대로 쓰지 않고, 설치된 로컬 모델 10개를 같은 입력으로 비교했습니다. JSON 형식을 강제하지 않으면 7개가 답을 쓰지 못해서 형식 강제를 넣었습니다. gemma4:e4b가 기존 기본값보다 2.37점 높았습니다. 점수는 모델 이름을 가리고 4항목으로 채점했습니다.</a:t>
+              <a:t>(20초) 생성 모델도 기본값을 그대로 쓰지 않고, 설치된 로컬 모델 10개를 같은 입력으로 비교했습니다. JSON 형식을 강제하지 않으면 7개가 답을 쓰지 못해서 형식 강제를 넣었습니다. 같은 형식 강제 조건에서 gemma4:e4b가 기존 기본값보다 2.43점 높았습니다. 점수는 모델 이름을 가리고 4항목으로 채점했습니다.</a:t>
+            </a:r>
+          </a:p>
+          <a:p/>
+          <a:p>
+            <a:r>
+              <a:t>(예상 질문) 보고서의 2.37점은 무엇인가요? → 형식 강제 없이 쓰던 원래 설정의 qwen3:4b(3.97점)와 비교한 값입니다(6.33 - 3.97). 그래프의 3.90점은 qwen3:4b에도 형식 강제를 더한 점수라, 같은 조건으로 비교하면 2.43점입니다.</a:t>
             </a:r>
           </a:p>
         </p:txBody>
@@ -7652,7 +7670,7 @@
                 <a:spcPct val="112000"/>
               </a:lnSpc>
               <a:spcAft>
-                <a:spcPts val="600"/>
+                <a:spcPts val="400"/>
               </a:spcAft>
             </a:pPr>
             <a:r>
@@ -7685,7 +7703,21 @@
                 <a:ea typeface="Noto Sans KR"/>
                 <a:cs typeface="Noto Sans KR"/>
               </a:rPr>
-              <a:t>기존 기본값 qwen3:4b보다 2.37점 높음</a:t>
+              <a:t>같은 형식 강제 조건에서 기존 기본값</a:t>
+            </a:r>
+            <a:br>
+              <a:rPr sz="1400"/>
+            </a:br>
+            <a:r>
+              <a:rPr sz="1400" b="0">
+                <a:solidFill>
+                  <a:srgbClr val="334155"/>
+                </a:solidFill>
+                <a:latin typeface="Noto Sans KR"/>
+                <a:ea typeface="Noto Sans KR"/>
+                <a:cs typeface="Noto Sans KR"/>
+              </a:rPr>
+              <a:t>qwen3:4b보다 2.43점 높음</a:t>
             </a:r>
           </a:p>
           <a:p>
@@ -7698,7 +7730,7 @@
               </a:spcAft>
             </a:pPr>
             <a:r>
-              <a:rPr sz="1300" b="0">
+              <a:rPr sz="1200" b="0">
                 <a:solidFill>
                   <a:srgbClr val="64748B"/>
                 </a:solidFill>
@@ -7706,7 +7738,21 @@
                 <a:ea typeface="Noto Sans KR"/>
                 <a:cs typeface="Noto Sans KR"/>
               </a:rPr>
-              <a:t>(95% 구간 1.00~3.83 · 15건 중 10건에서 앞섬)</a:t>
+              <a:t>(6.33 vs 3.90 · 95% 구간 1.03~3.93 · 15건 중</a:t>
+            </a:r>
+            <a:br>
+              <a:rPr sz="1200"/>
+            </a:br>
+            <a:r>
+              <a:rPr sz="1200" b="0">
+                <a:solidFill>
+                  <a:srgbClr val="64748B"/>
+                </a:solidFill>
+                <a:latin typeface="Noto Sans KR"/>
+                <a:ea typeface="Noto Sans KR"/>
+                <a:cs typeface="Noto Sans KR"/>
+              </a:rPr>
+              <a:t>10건에서 앞섬)</a:t>
             </a:r>
           </a:p>
         </p:txBody>
@@ -8597,7 +8643,21 @@
                 <a:ea typeface="Noto Sans KR"/>
                 <a:cs typeface="Noto Sans KR"/>
               </a:rPr>
-              <a:t>같은 입력 24건 × 2회 · 같은 분류 결과와 같은 지침 · 품질은 모델 이름을 가린 4항목 채점(사람이 10건 확인, 모두 동의)</a:t>
+              <a:t>같은 입력 24건 × 2회(모델마다 답 48개) · 같은 분류 결과와 같은 지침 · 품질은 모델 이름을 가린 4항목 채점. 이 비교의 채점 중 10건을 사람이 확인해</a:t>
+            </a:r>
+            <a:br>
+              <a:rPr sz="1300"/>
+            </a:br>
+            <a:r>
+              <a:rPr sz="1300" b="0">
+                <a:solidFill>
+                  <a:srgbClr val="334155"/>
+                </a:solidFill>
+                <a:latin typeface="Noto Sans KR"/>
+                <a:ea typeface="Noto Sans KR"/>
+                <a:cs typeface="Noto Sans KR"/>
+              </a:rPr>
+              <a:t>모두 동의</a:t>
             </a:r>
           </a:p>
           <a:p>
@@ -9201,7 +9261,65 @@
       </p:pic>
       <p:sp>
         <p:nvSpPr>
-          <p:cNvPr id="8" name="Rounded Rectangle 7"/>
+          <p:cNvPr id="8" name="TextBox 7"/>
+          <p:cNvSpPr txBox="1"/>
+          <p:nvPr/>
+        </p:nvSpPr>
+        <p:spPr>
+          <a:xfrm>
+            <a:off x="5989320" y="4846320"/>
+            <a:ext cx="5653735" cy="777240"/>
+          </a:xfrm>
+          <a:prstGeom prst="rect">
+            <a:avLst/>
+          </a:prstGeom>
+          <a:noFill/>
+        </p:spPr>
+        <p:txBody>
+          <a:bodyPr wrap="square" lIns="45720" rIns="45720" tIns="27432" bIns="27432" anchor="t">
+            <a:noAutofit/>
+          </a:bodyPr>
+          <a:lstStyle/>
+          <a:p>
+            <a:pPr algn="l" eaLnBrk="0">
+              <a:lnSpc>
+                <a:spcPct val="112000"/>
+              </a:lnSpc>
+              <a:spcAft>
+                <a:spcPts val="0"/>
+              </a:spcAft>
+            </a:pPr>
+            <a:r>
+              <a:rPr sz="1200" b="0">
+                <a:solidFill>
+                  <a:srgbClr val="64748B"/>
+                </a:solidFill>
+                <a:latin typeface="Noto Sans KR"/>
+                <a:ea typeface="Noto Sans KR"/>
+                <a:cs typeface="Noto Sans KR"/>
+              </a:rPr>
+              <a:t>최종 비교의 답 96개(입력 24건 × 2회 × 두 모델) 중 나쁜 답(4점 이하) 20개와 좋은</a:t>
+            </a:r>
+            <a:br>
+              <a:rPr sz="1200"/>
+            </a:br>
+            <a:r>
+              <a:rPr sz="1200" b="0">
+                <a:solidFill>
+                  <a:srgbClr val="64748B"/>
+                </a:solidFill>
+                <a:latin typeface="Noto Sans KR"/>
+                <a:ea typeface="Noto Sans KR"/>
+                <a:cs typeface="Noto Sans KR"/>
+              </a:rPr>
+              <a:t>답(8점) 54개를 셌습니다. 중간 점수(5~7점) 22개는 두 그래프에 넣지 않았습니다.</a:t>
+            </a:r>
+          </a:p>
+        </p:txBody>
+      </p:sp>
+      <p:sp>
+        <p:nvSpPr>
+          <p:cNvPr id="9" name="Rounded Rectangle 8"/>
           <p:cNvSpPr/>
           <p:nvPr/>
         </p:nvSpPr>
@@ -10207,7 +10325,7 @@
                 <a:ea typeface="Noto Sans KR"/>
                 <a:cs typeface="Noto Sans KR"/>
               </a:rPr>
-              <a:t>채점은 LLM(Claude)이 했습니다. 사람이 20건을 확인해 모두</a:t>
+              <a:t>채점은 LLM(Claude)이 했습니다. 사람이 두 비교에서 10건씩, 모두</a:t>
             </a:r>
             <a:br>
               <a:rPr sz="1500"/>
@@ -10221,7 +10339,21 @@
                 <a:ea typeface="Noto Sans KR"/>
                 <a:cs typeface="Noto Sans KR"/>
               </a:rPr>
-              <a:t>동의했지만, 전부 다시 채점하지는 않았습니다.</a:t>
+              <a:t>20건(로컬 모델 고르기 10, 로컬 vs 상용 10)을 확인해 모두 동의했지만,</a:t>
+            </a:r>
+            <a:br>
+              <a:rPr sz="1500"/>
+            </a:br>
+            <a:r>
+              <a:rPr sz="1500" b="0">
+                <a:solidFill>
+                  <a:srgbClr val="334155"/>
+                </a:solidFill>
+                <a:latin typeface="Noto Sans KR"/>
+                <a:ea typeface="Noto Sans KR"/>
+                <a:cs typeface="Noto Sans KR"/>
+              </a:rPr>
+              <a:t>전부 다시 채점하지는 않았습니다.</a:t>
             </a:r>
           </a:p>
         </p:txBody>
